--- a/public/fun/pack/pptx/news/카드뉴스_02_건강·안심습관_입춘날마루.pptx
+++ b/public/fun/pack/pptx/news/카드뉴스_02_건강·안심습관_입춘날마루.pptx
@@ -3348,7 +3348,7 @@
             <a:r>
               <a:rPr sz="3000" b="1" i="0">
                 <a:solidFill>
-                  <a:srgbClr val="74591B"/>
+                  <a:srgbClr val="72591D"/>
                 </a:solidFill>
               </a:rPr>
               <a:t>봄 알레르기 시즌 생활 습관</a:t>
@@ -3386,7 +3386,7 @@
             <a:r>
               <a:rPr sz="1500" b="0" i="1">
                 <a:solidFill>
-                  <a:srgbClr val="74591B"/>
+                  <a:srgbClr val="72591D"/>
                 </a:solidFill>
               </a:rPr>
               <a:t>옆으로 넘겨 보세요 →</a:t>
@@ -3446,7 +3446,7 @@
     <p:bg>
       <p:bgPr>
         <a:solidFill>
-          <a:srgbClr val="FBF7EE"/>
+          <a:srgbClr val="FCF9F3"/>
         </a:solidFill>
         <a:effectLst/>
       </p:bgPr>
@@ -3475,7 +3475,7 @@
           <a:noFill/>
           <a:ln w="28575">
             <a:solidFill>
-              <a:srgbClr val="C6992F"/>
+              <a:srgbClr val="DFAD3A"/>
             </a:solidFill>
           </a:ln>
         </p:spPr>
@@ -3504,7 +3504,7 @@
           <a:noFill/>
           <a:ln w="9525">
             <a:solidFill>
-              <a:srgbClr val="F5E9CC"/>
+              <a:srgbClr val="F7EDD4"/>
             </a:solidFill>
           </a:ln>
         </p:spPr>
@@ -3546,7 +3546,7 @@
             <a:r>
               <a:rPr sz="2600" b="1" i="0">
                 <a:solidFill>
-                  <a:srgbClr val="74591B"/>
+                  <a:srgbClr val="72591D"/>
                 </a:solidFill>
               </a:rPr>
               <a:t>아침 물 한 잔</a:t>
@@ -3584,7 +3584,7 @@
             <a:r>
               <a:rPr sz="6600" b="1" i="0">
                 <a:solidFill>
-                  <a:srgbClr val="C6992F"/>
+                  <a:srgbClr val="DFAD3A"/>
                 </a:solidFill>
               </a:rPr>
               <a:t>01</a:t>
@@ -3682,7 +3682,7 @@
     <p:bg>
       <p:bgPr>
         <a:solidFill>
-          <a:srgbClr val="FBF7EE"/>
+          <a:srgbClr val="FCF9F3"/>
         </a:solidFill>
         <a:effectLst/>
       </p:bgPr>
@@ -3711,7 +3711,7 @@
           <a:noFill/>
           <a:ln w="28575">
             <a:solidFill>
-              <a:srgbClr val="C6992F"/>
+              <a:srgbClr val="DFAD3A"/>
             </a:solidFill>
           </a:ln>
         </p:spPr>
@@ -3740,7 +3740,7 @@
           <a:noFill/>
           <a:ln w="9525">
             <a:solidFill>
-              <a:srgbClr val="F5E9CC"/>
+              <a:srgbClr val="F7EDD4"/>
             </a:solidFill>
           </a:ln>
         </p:spPr>
@@ -3782,7 +3782,7 @@
             <a:r>
               <a:rPr sz="2600" b="1" i="0">
                 <a:solidFill>
-                  <a:srgbClr val="74591B"/>
+                  <a:srgbClr val="72591D"/>
                 </a:solidFill>
               </a:rPr>
               <a:t>하루 십 분 걷기</a:t>
@@ -3820,7 +3820,7 @@
             <a:r>
               <a:rPr sz="6600" b="1" i="0">
                 <a:solidFill>
-                  <a:srgbClr val="C6992F"/>
+                  <a:srgbClr val="DFAD3A"/>
                 </a:solidFill>
               </a:rPr>
               <a:t>02</a:t>
@@ -3918,7 +3918,7 @@
     <p:bg>
       <p:bgPr>
         <a:solidFill>
-          <a:srgbClr val="FBF7EE"/>
+          <a:srgbClr val="FCF9F3"/>
         </a:solidFill>
         <a:effectLst/>
       </p:bgPr>
@@ -3947,7 +3947,7 @@
           <a:noFill/>
           <a:ln w="28575">
             <a:solidFill>
-              <a:srgbClr val="C6992F"/>
+              <a:srgbClr val="DFAD3A"/>
             </a:solidFill>
           </a:ln>
         </p:spPr>
@@ -3976,7 +3976,7 @@
           <a:noFill/>
           <a:ln w="9525">
             <a:solidFill>
-              <a:srgbClr val="F5E9CC"/>
+              <a:srgbClr val="F7EDD4"/>
             </a:solidFill>
           </a:ln>
         </p:spPr>
@@ -4018,7 +4018,7 @@
             <a:r>
               <a:rPr sz="2600" b="1" i="0">
                 <a:solidFill>
-                  <a:srgbClr val="74591B"/>
+                  <a:srgbClr val="72591D"/>
                 </a:solidFill>
               </a:rPr>
               <a:t>검진 날짜 적어 두기</a:t>
@@ -4056,7 +4056,7 @@
             <a:r>
               <a:rPr sz="6600" b="1" i="0">
                 <a:solidFill>
-                  <a:srgbClr val="C6992F"/>
+                  <a:srgbClr val="DFAD3A"/>
                 </a:solidFill>
               </a:rPr>
               <a:t>03</a:t>
@@ -4154,7 +4154,7 @@
     <p:bg>
       <p:bgPr>
         <a:solidFill>
-          <a:srgbClr val="FBF7EE"/>
+          <a:srgbClr val="FCF9F3"/>
         </a:solidFill>
         <a:effectLst/>
       </p:bgPr>
@@ -4183,7 +4183,7 @@
           <a:noFill/>
           <a:ln w="28575">
             <a:solidFill>
-              <a:srgbClr val="C6992F"/>
+              <a:srgbClr val="DFAD3A"/>
             </a:solidFill>
           </a:ln>
         </p:spPr>
@@ -4212,7 +4212,7 @@
           <a:noFill/>
           <a:ln w="9525">
             <a:solidFill>
-              <a:srgbClr val="F5E9CC"/>
+              <a:srgbClr val="F7EDD4"/>
             </a:solidFill>
           </a:ln>
         </p:spPr>
@@ -4254,7 +4254,7 @@
             <a:r>
               <a:rPr sz="2600" b="1" i="0">
                 <a:solidFill>
-                  <a:srgbClr val="74591B"/>
+                  <a:srgbClr val="72591D"/>
                 </a:solidFill>
               </a:rPr>
               <a:t>잠들기 전 스마트폰 내려놓기</a:t>
@@ -4292,7 +4292,7 @@
             <a:r>
               <a:rPr sz="6600" b="1" i="0">
                 <a:solidFill>
-                  <a:srgbClr val="C6992F"/>
+                  <a:srgbClr val="DFAD3A"/>
                 </a:solidFill>
               </a:rPr>
               <a:t>04</a:t>
@@ -4390,7 +4390,7 @@
     <p:bg>
       <p:bgPr>
         <a:solidFill>
-          <a:srgbClr val="FBF7EE"/>
+          <a:srgbClr val="FCF9F3"/>
         </a:solidFill>
         <a:effectLst/>
       </p:bgPr>
@@ -4419,7 +4419,7 @@
           <a:noFill/>
           <a:ln w="28575">
             <a:solidFill>
-              <a:srgbClr val="C6992F"/>
+              <a:srgbClr val="DFAD3A"/>
             </a:solidFill>
           </a:ln>
         </p:spPr>
@@ -4448,7 +4448,7 @@
           <a:noFill/>
           <a:ln w="9525">
             <a:solidFill>
-              <a:srgbClr val="F5E9CC"/>
+              <a:srgbClr val="F7EDD4"/>
             </a:solidFill>
           </a:ln>
         </p:spPr>
@@ -4490,7 +4490,7 @@
             <a:r>
               <a:rPr sz="2600" b="1" i="0">
                 <a:solidFill>
-                  <a:srgbClr val="74591B"/>
+                  <a:srgbClr val="72591D"/>
                 </a:solidFill>
               </a:rPr>
               <a:t>가족 건강 이야기 나누기</a:t>
@@ -4528,7 +4528,7 @@
             <a:r>
               <a:rPr sz="6600" b="1" i="0">
                 <a:solidFill>
-                  <a:srgbClr val="C6992F"/>
+                  <a:srgbClr val="DFAD3A"/>
                 </a:solidFill>
               </a:rPr>
               <a:t>05</a:t>
@@ -4684,7 +4684,7 @@
             <a:r>
               <a:rPr sz="2800" b="1" i="0">
                 <a:solidFill>
-                  <a:srgbClr val="74591B"/>
+                  <a:srgbClr val="72591D"/>
                 </a:solidFill>
               </a:rPr>
               <a:t>저장해 두고 필요할 때 꺼내 보세요</a:t>
@@ -4722,7 +4722,7 @@
             <a:r>
               <a:rPr sz="1500" b="0" i="1">
                 <a:solidFill>
-                  <a:srgbClr val="74591B"/>
+                  <a:srgbClr val="72591D"/>
                 </a:solidFill>
               </a:rPr>
               <a:t>마음에 들면 공유해 주세요</a:t>
@@ -4787,34 +4787,34 @@
         <a:sysClr val="window" lastClr="FFFFFF"/>
       </a:lt1>
       <a:dk2>
-        <a:srgbClr val="74591B"/>
+        <a:srgbClr val="72591D"/>
       </a:dk2>
       <a:lt2>
-        <a:srgbClr val="FBF7EE"/>
+        <a:srgbClr val="FCF9F3"/>
       </a:lt2>
       <a:accent1>
-        <a:srgbClr val="C6992F"/>
+        <a:srgbClr val="DFAD3A"/>
       </a:accent1>
       <a:accent2>
-        <a:srgbClr val="3B8091"/>
+        <a:srgbClr val="339941"/>
       </a:accent2>
       <a:accent3>
-        <a:srgbClr val="74591B"/>
+        <a:srgbClr val="72591D"/>
       </a:accent3>
       <a:accent4>
-        <a:srgbClr val="F5E9CC"/>
+        <a:srgbClr val="F7EDD4"/>
       </a:accent4>
       <a:accent5>
-        <a:srgbClr val="808C60"/>
+        <a:srgbClr val="89A33E"/>
       </a:accent5>
       <a:accent6>
-        <a:srgbClr val="AC9B76"/>
+        <a:srgbClr val="AA9B77"/>
       </a:accent6>
       <a:hlink>
-        <a:srgbClr val="C6992F"/>
+        <a:srgbClr val="DFAD3A"/>
       </a:hlink>
       <a:folHlink>
-        <a:srgbClr val="74591B"/>
+        <a:srgbClr val="72591D"/>
       </a:folHlink>
     </a:clrScheme>
     <a:fontScheme name="Office">
